--- a/交付物/演示文稿/M0_演示文稿_CFG-5_第4课_组团队做番茄钟_v2.pptx
+++ b/交付物/演示文稿/M0_演示文稿_CFG-5_第4课_组团队做番茄钟_v2.pptx
@@ -1877,7 +1877,7 @@
                 <a:latin typeface="MiSans"/>
                 <a:ea typeface="MiSans"/>
               </a:rPr>
-              <a:t>柴火创客学院 M0 · 零基础智能硬件入门 · 第 4 课</a:t>
+              <a:t>柴火创客学园 M0 · 零基础智能硬件入门 · 第 4 课</a:t>
             </a:r>
             <a:endParaRPr lang="en-US" sz="1600"/>
           </a:p>
@@ -1919,7 +1919,7 @@
                 <a:latin typeface="MiSans"/>
                 <a:ea typeface="MiSans"/>
               </a:rPr>
-              <a:t>柴火创客学院 ｜ 2026</a:t>
+              <a:t>柴火创客学园 ｜ 2026</a:t>
             </a:r>
             <a:endParaRPr lang="en-US" sz="1400"/>
           </a:p>
